--- a/data/outputs/v2/Grade11/Biology/Quizzes/SS2.2_Growth_and_Development_in_Plants/Biology_G11_SS2.2_Growth_and_Development_in_Plants_L2_QuickCheck.pptx
+++ b/data/outputs/v2/Grade11/Biology/Quizzes/SS2.2_Growth_and_Development_in_Plants/Biology_G11_SS2.2_Growth_and_Development_in_Plants_L2_QuickCheck.pptx
@@ -1698,7 +1698,7 @@
                 <a:ea typeface="Arial" pitchFamily="34" charset="-122"/>
                 <a:cs typeface="Arial" pitchFamily="34" charset="-120"/>
               </a:rPr>
-              <a:t>Lesson 2: Meaning of Growth and Development; Structure of Monocot and Dicot Seeds</a:t>
+              <a:t>Lesson 2: Growth vs Development and Inside the Seed: Maize H614 and Rosecoco Beans</a:t>
             </a:r>
             <a:endParaRPr lang="en-US" sz="2000" dirty="0"/>
           </a:p>
@@ -2021,7 +2021,7 @@
                 <a:ea typeface="Arial" pitchFamily="34" charset="-122"/>
                 <a:cs typeface="Arial" pitchFamily="34" charset="-120"/>
               </a:rPr>
-              <a:t>A Grade 11 class is discussing how growth differs from development in a maize plant. Which statement correctly distinguishes the two?</a:t>
+              <a:t>On Mr. Wafula's farm, a bean plant makes its first single-bladed (unifoliate) leaves on Day 12 and three-part (trifoliate) leaves on Day 18. How should this change be classified?</a:t>
             </a:r>
             <a:endParaRPr lang="en-US" sz="2000" dirty="0"/>
           </a:p>
@@ -2113,7 +2113,7 @@
               <a:buNone/>
             </a:pPr>
             <a:r>
-              <a:rPr lang="en-US" sz="1300" dirty="0">
+              <a:rPr lang="en-US" sz="1500" dirty="0">
                 <a:solidFill>
                   <a:srgbClr val="FFFFFF"/>
                 </a:solidFill>
@@ -2121,9 +2121,9 @@
                 <a:ea typeface="Arial" pitchFamily="34" charset="-122"/>
                 <a:cs typeface="Arial" pitchFamily="34" charset="-120"/>
               </a:rPr>
-              <a:t>Growth and development mean the same thing, because both describe a plant getting taller.</a:t>
-            </a:r>
-            <a:endParaRPr lang="en-US" sz="1300" dirty="0"/>
+              <a:t>Growth only, because the plant has become bigger</a:t>
+            </a:r>
+            <a:endParaRPr lang="en-US" sz="1500" dirty="0"/>
           </a:p>
         </p:txBody>
       </p:sp>
@@ -2213,7 +2213,7 @@
               <a:buNone/>
             </a:pPr>
             <a:r>
-              <a:rPr lang="en-US" sz="1300" dirty="0">
+              <a:rPr lang="en-US" sz="1500" dirty="0">
                 <a:solidFill>
                   <a:srgbClr val="FFFFFF"/>
                 </a:solidFill>
@@ -2221,9 +2221,9 @@
                 <a:ea typeface="Arial" pitchFamily="34" charset="-122"/>
                 <a:cs typeface="Arial" pitchFamily="34" charset="-120"/>
               </a:rPr>
-              <a:t>Growth is a permanent increase in size, dry mass or cell number, while development is a change in form and complexity, such as cell differentiation.</a:t>
-            </a:r>
-            <a:endParaRPr lang="en-US" sz="1300" dirty="0"/>
+              <a:t>Development, because the leaf changes in form and becomes more complex through differentiation</a:t>
+            </a:r>
+            <a:endParaRPr lang="en-US" sz="1500" dirty="0"/>
           </a:p>
         </p:txBody>
       </p:sp>
@@ -2313,7 +2313,7 @@
               <a:buNone/>
             </a:pPr>
             <a:r>
-              <a:rPr lang="en-US" sz="1300" dirty="0">
+              <a:rPr lang="en-US" sz="1500" dirty="0">
                 <a:solidFill>
                   <a:srgbClr val="FFFFFF"/>
                 </a:solidFill>
@@ -2321,9 +2321,9 @@
                 <a:ea typeface="Arial" pitchFamily="34" charset="-122"/>
                 <a:cs typeface="Arial" pitchFamily="34" charset="-120"/>
               </a:rPr>
-              <a:t>Growth is the formation of new organs such as leaves and flowers, while development is only an increase in height.</a:t>
-            </a:r>
-            <a:endParaRPr lang="en-US" sz="1300" dirty="0"/>
+              <a:t>Growth only, because there are now more leaves</a:t>
+            </a:r>
+            <a:endParaRPr lang="en-US" sz="1500" dirty="0"/>
           </a:p>
         </p:txBody>
       </p:sp>
@@ -2413,7 +2413,7 @@
               <a:buNone/>
             </a:pPr>
             <a:r>
-              <a:rPr lang="en-US" sz="1300" dirty="0">
+              <a:rPr lang="en-US" sz="1500" dirty="0">
                 <a:solidFill>
                   <a:srgbClr val="FFFFFF"/>
                 </a:solidFill>
@@ -2421,9 +2421,9 @@
                 <a:ea typeface="Arial" pitchFamily="34" charset="-122"/>
                 <a:cs typeface="Arial" pitchFamily="34" charset="-120"/>
               </a:rPr>
-              <a:t>Growth is any increase in size, even a temporary one, while development is a decrease in size.</a:t>
-            </a:r>
-            <a:endParaRPr lang="en-US" sz="1300" dirty="0"/>
+              <a:t>Neither growth nor development, because leaves are not part of the seed</a:t>
+            </a:r>
+            <a:endParaRPr lang="en-US" sz="1500" dirty="0"/>
           </a:p>
         </p:txBody>
       </p:sp>
@@ -2623,7 +2623,7 @@
               <a:buNone/>
             </a:pPr>
             <a:r>
-              <a:rPr lang="en-US" sz="2000" b="1" dirty="0">
+              <a:rPr lang="en-US" sz="2300" b="1" dirty="0">
                 <a:solidFill>
                   <a:srgbClr val="FFFFFF"/>
                 </a:solidFill>
@@ -2631,9 +2631,9 @@
                 <a:ea typeface="Arial" pitchFamily="34" charset="-122"/>
                 <a:cs typeface="Arial" pitchFamily="34" charset="-120"/>
               </a:rPr>
-              <a:t>A farmer watches her maize plants over several weeks. Which observation is an example of development rather than only growth?</a:t>
-            </a:r>
-            <a:endParaRPr lang="en-US" sz="2000" dirty="0"/>
+              <a:t>A dry maize grain swells after 25 mm of rain falls on the field. Why is this swelling NOT counted as true growth?</a:t>
+            </a:r>
+            <a:endParaRPr lang="en-US" sz="2300" dirty="0"/>
           </a:p>
         </p:txBody>
       </p:sp>
@@ -2723,7 +2723,7 @@
               <a:buNone/>
             </a:pPr>
             <a:r>
-              <a:rPr lang="en-US" sz="1700" dirty="0">
+              <a:rPr lang="en-US" sz="1500" dirty="0">
                 <a:solidFill>
                   <a:srgbClr val="FFFFFF"/>
                 </a:solidFill>
@@ -2731,9 +2731,9 @@
                 <a:ea typeface="Arial" pitchFamily="34" charset="-122"/>
                 <a:cs typeface="Arial" pitchFamily="34" charset="-120"/>
               </a:rPr>
-              <a:t>The maize plant forms a tassel and cobs.</a:t>
-            </a:r>
-            <a:endParaRPr lang="en-US" sz="1700" dirty="0"/>
+              <a:t>Swelling makes new organs form, so it is development, not growth</a:t>
+            </a:r>
+            <a:endParaRPr lang="en-US" sz="1500" dirty="0"/>
           </a:p>
         </p:txBody>
       </p:sp>
@@ -2823,7 +2823,7 @@
               <a:buNone/>
             </a:pPr>
             <a:r>
-              <a:rPr lang="en-US" sz="1700" dirty="0">
+              <a:rPr lang="en-US" sz="1500" dirty="0">
                 <a:solidFill>
                   <a:srgbClr val="FFFFFF"/>
                 </a:solidFill>
@@ -2831,9 +2831,9 @@
                 <a:ea typeface="Arial" pitchFamily="34" charset="-122"/>
                 <a:cs typeface="Arial" pitchFamily="34" charset="-120"/>
               </a:rPr>
-              <a:t>The maize root extends deeper into the soil.</a:t>
-            </a:r>
-            <a:endParaRPr lang="en-US" sz="1700" dirty="0"/>
+              <a:t>Growth only means getting taller, and the grain did not get taller</a:t>
+            </a:r>
+            <a:endParaRPr lang="en-US" sz="1500" dirty="0"/>
           </a:p>
         </p:txBody>
       </p:sp>
@@ -2923,7 +2923,7 @@
               <a:buNone/>
             </a:pPr>
             <a:r>
-              <a:rPr lang="en-US" sz="1700" dirty="0">
+              <a:rPr lang="en-US" sz="1500" dirty="0">
                 <a:solidFill>
                   <a:srgbClr val="FFFFFF"/>
                 </a:solidFill>
@@ -2931,9 +2931,9 @@
                 <a:ea typeface="Arial" pitchFamily="34" charset="-122"/>
                 <a:cs typeface="Arial" pitchFamily="34" charset="-120"/>
               </a:rPr>
-              <a:t>The maize stem becomes taller.</a:t>
-            </a:r>
-            <a:endParaRPr lang="en-US" sz="1700" dirty="0"/>
+              <a:t>Maize grains are not living things, so they cannot grow</a:t>
+            </a:r>
+            <a:endParaRPr lang="en-US" sz="1500" dirty="0"/>
           </a:p>
         </p:txBody>
       </p:sp>
@@ -3023,7 +3023,7 @@
               <a:buNone/>
             </a:pPr>
             <a:r>
-              <a:rPr lang="en-US" sz="1700" dirty="0">
+              <a:rPr lang="en-US" sz="1500" dirty="0">
                 <a:solidFill>
                   <a:srgbClr val="FFFFFF"/>
                 </a:solidFill>
@@ -3031,9 +3031,9 @@
                 <a:ea typeface="Arial" pitchFamily="34" charset="-122"/>
                 <a:cs typeface="Arial" pitchFamily="34" charset="-120"/>
               </a:rPr>
-              <a:t>The maize stem becomes thicker.</a:t>
-            </a:r>
-            <a:endParaRPr lang="en-US" sz="1700" dirty="0"/>
+              <a:t>Water can be lost again, so the increase is not a permanent, irreversible increase in size or dry mass</a:t>
+            </a:r>
+            <a:endParaRPr lang="en-US" sz="1500" dirty="0"/>
           </a:p>
         </p:txBody>
       </p:sp>
@@ -3241,7 +3241,7 @@
                 <a:ea typeface="Arial" pitchFamily="34" charset="-122"/>
                 <a:cs typeface="Arial" pitchFamily="34" charset="-120"/>
               </a:rPr>
-              <a:t>A group splits open a soaked bean seed and finds a small embryo between the two cotyledons. Which part of the embryo will grow into the root of the new plant?</a:t>
+              <a:t>The stem of a maize plant is 6 mm wide on Day 14 and 22 mm wide on Day 42. By how much did the stem width increase, and is this growth?</a:t>
             </a:r>
             <a:endParaRPr lang="en-US" sz="2000" dirty="0"/>
           </a:p>
@@ -3341,7 +3341,7 @@
                 <a:ea typeface="Arial" pitchFamily="34" charset="-122"/>
                 <a:cs typeface="Arial" pitchFamily="34" charset="-120"/>
               </a:rPr>
-              <a:t>The plumule</a:t>
+              <a:t>16 mm; it is growth, because the size increased permanently</a:t>
             </a:r>
             <a:endParaRPr lang="en-US" sz="1700" dirty="0"/>
           </a:p>
@@ -3441,7 +3441,7 @@
                 <a:ea typeface="Arial" pitchFamily="34" charset="-122"/>
                 <a:cs typeface="Arial" pitchFamily="34" charset="-120"/>
               </a:rPr>
-              <a:t>The radicle</a:t>
+              <a:t>28 mm; it is growth, because the stem became thicker</a:t>
             </a:r>
             <a:endParaRPr lang="en-US" sz="1700" dirty="0"/>
           </a:p>
@@ -3541,7 +3541,7 @@
                 <a:ea typeface="Arial" pitchFamily="34" charset="-122"/>
                 <a:cs typeface="Arial" pitchFamily="34" charset="-120"/>
               </a:rPr>
-              <a:t>The cotyledon</a:t>
+              <a:t>16 mm; it is not growth, because the plant did not get taller</a:t>
             </a:r>
             <a:endParaRPr lang="en-US" sz="1700" dirty="0"/>
           </a:p>
@@ -3641,7 +3641,7 @@
                 <a:ea typeface="Arial" pitchFamily="34" charset="-122"/>
                 <a:cs typeface="Arial" pitchFamily="34" charset="-120"/>
               </a:rPr>
-              <a:t>The testa</a:t>
+              <a:t>22 mm; it is development, because the stem changed form</a:t>
             </a:r>
             <a:endParaRPr lang="en-US" sz="1700" dirty="0"/>
           </a:p>
@@ -3851,7 +3851,7 @@
                 <a:ea typeface="Arial" pitchFamily="34" charset="-122"/>
                 <a:cs typeface="Arial" pitchFamily="34" charset="-120"/>
               </a:rPr>
-              <a:t>A learner cuts a soaked maize grain lengthwise and puts a drop of iodine solution on the cut surface. The large whitish area (endosperm) turns blue-black. What does this show?</a:t>
+              <a:t>A learner splits a soaked Rosecoco bean seed into two halves. Which part of the bean stores the food that the young plant will use?</a:t>
             </a:r>
             <a:endParaRPr lang="en-US" sz="2000" dirty="0"/>
           </a:p>
@@ -3951,7 +3951,7 @@
                 <a:ea typeface="Arial" pitchFamily="34" charset="-122"/>
                 <a:cs typeface="Arial" pitchFamily="34" charset="-120"/>
               </a:rPr>
-              <a:t>The endosperm is dead tissue.</a:t>
+              <a:t>The testa</a:t>
             </a:r>
             <a:endParaRPr lang="en-US" sz="1700" dirty="0"/>
           </a:p>
@@ -4051,7 +4051,7 @@
                 <a:ea typeface="Arial" pitchFamily="34" charset="-122"/>
                 <a:cs typeface="Arial" pitchFamily="34" charset="-120"/>
               </a:rPr>
-              <a:t>The endosperm contains starch, so it is the food store of the maize grain.</a:t>
+              <a:t>The two cotyledons</a:t>
             </a:r>
             <a:endParaRPr lang="en-US" sz="1700" dirty="0"/>
           </a:p>
@@ -4151,7 +4151,7 @@
                 <a:ea typeface="Arial" pitchFamily="34" charset="-122"/>
                 <a:cs typeface="Arial" pitchFamily="34" charset="-120"/>
               </a:rPr>
-              <a:t>The endosperm contains the embryo of the maize grain.</a:t>
+              <a:t>The micropyle</a:t>
             </a:r>
             <a:endParaRPr lang="en-US" sz="1700" dirty="0"/>
           </a:p>
@@ -4251,7 +4251,7 @@
                 <a:ea typeface="Arial" pitchFamily="34" charset="-122"/>
                 <a:cs typeface="Arial" pitchFamily="34" charset="-120"/>
               </a:rPr>
-              <a:t>The endosperm has absorbed water, so it will become the root.</a:t>
+              <a:t>The hilum</a:t>
             </a:r>
             <a:endParaRPr lang="en-US" sz="1700" dirty="0"/>
           </a:p>
@@ -4422,7 +4422,7 @@
                 <a:ea typeface="Arial" pitchFamily="34" charset="-122"/>
                 <a:cs typeface="Arial" pitchFamily="34" charset="-120"/>
               </a:rPr>
-              <a:t>Use after: Explain phase</a:t>
+              <a:t>Use after: Observe phase</a:t>
             </a:r>
             <a:endParaRPr lang="en-US" sz="1100" dirty="0"/>
           </a:p>
@@ -4461,7 +4461,7 @@
                 <a:ea typeface="Arial" pitchFamily="34" charset="-122"/>
                 <a:cs typeface="Arial" pitchFamily="34" charset="-120"/>
               </a:rPr>
-              <a:t>In a maize grain, the coleoptile is a sheath around the plumule. What is its job during germination?</a:t>
+              <a:t>In a maize grain, which part protects the shoot tip (plumule) as it pushes up through the soil?</a:t>
             </a:r>
             <a:endParaRPr lang="en-US" sz="2300" dirty="0"/>
           </a:p>
@@ -4561,7 +4561,7 @@
                 <a:ea typeface="Arial" pitchFamily="34" charset="-122"/>
                 <a:cs typeface="Arial" pitchFamily="34" charset="-120"/>
               </a:rPr>
-              <a:t>It protects the plumule as it pushes up through the soil.</a:t>
+              <a:t>The coleoptile</a:t>
             </a:r>
             <a:endParaRPr lang="en-US" sz="1700" dirty="0"/>
           </a:p>
@@ -4661,7 +4661,7 @@
                 <a:ea typeface="Arial" pitchFamily="34" charset="-122"/>
                 <a:cs typeface="Arial" pitchFamily="34" charset="-120"/>
               </a:rPr>
-              <a:t>It absorbs digested food from the endosperm.</a:t>
+              <a:t>The coleorhiza</a:t>
             </a:r>
             <a:endParaRPr lang="en-US" sz="1700" dirty="0"/>
           </a:p>
@@ -4761,7 +4761,7 @@
                 <a:ea typeface="Arial" pitchFamily="34" charset="-122"/>
                 <a:cs typeface="Arial" pitchFamily="34" charset="-120"/>
               </a:rPr>
-              <a:t>It protects the radicle as the root emerges.</a:t>
+              <a:t>The scutellum</a:t>
             </a:r>
             <a:endParaRPr lang="en-US" sz="1700" dirty="0"/>
           </a:p>
@@ -4861,7 +4861,7 @@
                 <a:ea typeface="Arial" pitchFamily="34" charset="-122"/>
                 <a:cs typeface="Arial" pitchFamily="34" charset="-120"/>
               </a:rPr>
-              <a:t>It allows water to enter through a small pore.</a:t>
+              <a:t>The endosperm</a:t>
             </a:r>
             <a:endParaRPr lang="en-US" sz="1700" dirty="0"/>
           </a:p>
@@ -5071,7 +5071,7 @@
                 <a:ea typeface="Arial" pitchFamily="34" charset="-122"/>
                 <a:cs typeface="Arial" pitchFamily="34" charset="-120"/>
               </a:rPr>
-              <a:t>Which row correctly compares a maize grain (monocot) with a bean seed (dicot)?</a:t>
+              <a:t>Which statement correctly describes how a maize grain (a monocot) gets food for its embryo?</a:t>
             </a:r>
             <a:endParaRPr lang="en-US" sz="2300" dirty="0"/>
           </a:p>
@@ -5163,7 +5163,7 @@
               <a:buNone/>
             </a:pPr>
             <a:r>
-              <a:rPr lang="en-US" sz="1300" dirty="0">
+              <a:rPr lang="en-US" sz="1500" dirty="0">
                 <a:solidFill>
                   <a:srgbClr val="FFFFFF"/>
                 </a:solidFill>
@@ -5171,9 +5171,9 @@
                 <a:ea typeface="Arial" pitchFamily="34" charset="-122"/>
                 <a:cs typeface="Arial" pitchFamily="34" charset="-120"/>
               </a:rPr>
-              <a:t>Maize: one cotyledon, no food store. Bean: two cotyledons, food stored in the endosperm.</a:t>
-            </a:r>
-            <a:endParaRPr lang="en-US" sz="1300" dirty="0"/>
+              <a:t>Food is stored in two large cotyledons, as in a bean</a:t>
+            </a:r>
+            <a:endParaRPr lang="en-US" sz="1500" dirty="0"/>
           </a:p>
         </p:txBody>
       </p:sp>
@@ -5263,7 +5263,7 @@
               <a:buNone/>
             </a:pPr>
             <a:r>
-              <a:rPr lang="en-US" sz="1300" dirty="0">
+              <a:rPr lang="en-US" sz="1500" dirty="0">
                 <a:solidFill>
                   <a:srgbClr val="FFFFFF"/>
                 </a:solidFill>
@@ -5271,9 +5271,9 @@
                 <a:ea typeface="Arial" pitchFamily="34" charset="-122"/>
                 <a:cs typeface="Arial" pitchFamily="34" charset="-120"/>
               </a:rPr>
-              <a:t>Maize: one cotyledon (scutellum), food stored in the endosperm. Bean: two cotyledons, food stored in the cotyledons.</a:t>
-            </a:r>
-            <a:endParaRPr lang="en-US" sz="1300" dirty="0"/>
+              <a:t>The endosperm is the embryo, and it is the part that grows into the plant</a:t>
+            </a:r>
+            <a:endParaRPr lang="en-US" sz="1500" dirty="0"/>
           </a:p>
         </p:txBody>
       </p:sp>
@@ -5363,7 +5363,7 @@
               <a:buNone/>
             </a:pPr>
             <a:r>
-              <a:rPr lang="en-US" sz="1300" dirty="0">
+              <a:rPr lang="en-US" sz="1500" dirty="0">
                 <a:solidFill>
                   <a:srgbClr val="FFFFFF"/>
                 </a:solidFill>
@@ -5371,9 +5371,9 @@
                 <a:ea typeface="Arial" pitchFamily="34" charset="-122"/>
                 <a:cs typeface="Arial" pitchFamily="34" charset="-120"/>
               </a:rPr>
-              <a:t>Maize and bean: two cotyledons, food stored in the endosperm.</a:t>
-            </a:r>
-            <a:endParaRPr lang="en-US" sz="1300" dirty="0"/>
+              <a:t>Food is stored in the endosperm, and the single cotyledon (scutellum) absorbs it for the embryo</a:t>
+            </a:r>
+            <a:endParaRPr lang="en-US" sz="1500" dirty="0"/>
           </a:p>
         </p:txBody>
       </p:sp>
@@ -5463,7 +5463,7 @@
               <a:buNone/>
             </a:pPr>
             <a:r>
-              <a:rPr lang="en-US" sz="1300" dirty="0">
+              <a:rPr lang="en-US" sz="1500" dirty="0">
                 <a:solidFill>
                   <a:srgbClr val="FFFFFF"/>
                 </a:solidFill>
@@ -5471,9 +5471,9 @@
                 <a:ea typeface="Arial" pitchFamily="34" charset="-122"/>
                 <a:cs typeface="Arial" pitchFamily="34" charset="-120"/>
               </a:rPr>
-              <a:t>Maize: two cotyledons, food stored in the cotyledons. Bean: one cotyledon, food stored in the endosperm.</a:t>
-            </a:r>
-            <a:endParaRPr lang="en-US" sz="1300" dirty="0"/>
+              <a:t>Maize has no cotyledon, so the embryo makes all its own food</a:t>
+            </a:r>
+            <a:endParaRPr lang="en-US" sz="1500" dirty="0"/>
           </a:p>
         </p:txBody>
       </p:sp>
@@ -5681,7 +5681,7 @@
                 <a:ea typeface="Arial" pitchFamily="34" charset="-122"/>
                 <a:cs typeface="Arial" pitchFamily="34" charset="-120"/>
               </a:rPr>
-              <a:t>A learner draws a model of how a maize grain starts to grow after planting. Which arrow path correctly shows how stored food reaches the embryo?</a:t>
+              <a:t>A learner revises their Day 1 model by adding labelled seed drawings and arrows inside the soil. Which arrows show the correct development of the embryo parts?</a:t>
             </a:r>
             <a:endParaRPr lang="en-US" sz="2000" dirty="0"/>
           </a:p>
@@ -5781,7 +5781,7 @@
                 <a:ea typeface="Arial" pitchFamily="34" charset="-122"/>
                 <a:cs typeface="Arial" pitchFamily="34" charset="-120"/>
               </a:rPr>
-              <a:t>Endosperm, then the scutellum, then the embryo</a:t>
+              <a:t>Radicle becomes the leaf; plumule becomes the root</a:t>
             </a:r>
             <a:endParaRPr lang="en-US" sz="1700" dirty="0"/>
           </a:p>
@@ -5881,7 +5881,7 @@
                 <a:ea typeface="Arial" pitchFamily="34" charset="-122"/>
                 <a:cs typeface="Arial" pitchFamily="34" charset="-120"/>
               </a:rPr>
-              <a:t>Testa, then the embryo</a:t>
+              <a:t>Radicle becomes the root; plumule becomes the shoot</a:t>
             </a:r>
             <a:endParaRPr lang="en-US" sz="1700" dirty="0"/>
           </a:p>
@@ -5981,7 +5981,7 @@
                 <a:ea typeface="Arial" pitchFamily="34" charset="-122"/>
                 <a:cs typeface="Arial" pitchFamily="34" charset="-120"/>
               </a:rPr>
-              <a:t>Cotyledons, then the embryo</a:t>
+              <a:t>Radicle becomes the shoot; plumule becomes the root</a:t>
             </a:r>
             <a:endParaRPr lang="en-US" sz="1700" dirty="0"/>
           </a:p>
@@ -6081,7 +6081,7 @@
                 <a:ea typeface="Arial" pitchFamily="34" charset="-122"/>
                 <a:cs typeface="Arial" pitchFamily="34" charset="-120"/>
               </a:rPr>
-              <a:t>Coleoptile, then the radicle</a:t>
+              <a:t>Radicle becomes the testa; plumule becomes the cotyledon</a:t>
             </a:r>
             <a:endParaRPr lang="en-US" sz="1700" dirty="0"/>
           </a:p>
